--- a/assets/powerpoints/module-n1-orientation/B2-c-est-la-cafeteria.pptx
+++ b/assets/powerpoints/module-n1-orientation/B2-c-est-la-cafeteria.pptx
@@ -8456,13 +8456,76 @@
               </a:lnSpc>
             </a:pPr>
             <a:r>
+              <a:rPr sz="2000" b="1" i="0">
+                <a:solidFill>
+                  <a:srgbClr val="4B4F52"/>
+                </a:solidFill>
+                <a:latin typeface="Verdana"/>
+              </a:rPr>
+              <a:t>la</a:t>
+            </a:r>
+            <a:r>
               <a:rPr sz="2000" b="0" i="0">
                 <a:solidFill>
                   <a:srgbClr val="4B4F52"/>
                 </a:solidFill>
                 <a:latin typeface="Verdana"/>
               </a:rPr>
-              <a:t>&lt;b&gt;la&lt;/b&gt; cafétéria · &lt;b&gt;le&lt;/b&gt; vestiaire · &lt;b&gt;les&lt;/b&gt; toilettes · &lt;b&gt;l'&lt;/b&gt;accueil. Il ne se devine pas. « Cafétéria » tout seul ne s'apprend pas ; « la cafétéria », oui.</a:t>
+              <a:t> cafétéria · </a:t>
+            </a:r>
+            <a:r>
+              <a:rPr sz="2000" b="1" i="0">
+                <a:solidFill>
+                  <a:srgbClr val="4B4F52"/>
+                </a:solidFill>
+                <a:latin typeface="Verdana"/>
+              </a:rPr>
+              <a:t>le</a:t>
+            </a:r>
+            <a:r>
+              <a:rPr sz="2000" b="0" i="0">
+                <a:solidFill>
+                  <a:srgbClr val="4B4F52"/>
+                </a:solidFill>
+                <a:latin typeface="Verdana"/>
+              </a:rPr>
+              <a:t> vestiaire · </a:t>
+            </a:r>
+            <a:r>
+              <a:rPr sz="2000" b="1" i="0">
+                <a:solidFill>
+                  <a:srgbClr val="4B4F52"/>
+                </a:solidFill>
+                <a:latin typeface="Verdana"/>
+              </a:rPr>
+              <a:t>les</a:t>
+            </a:r>
+            <a:r>
+              <a:rPr sz="2000" b="0" i="0">
+                <a:solidFill>
+                  <a:srgbClr val="4B4F52"/>
+                </a:solidFill>
+                <a:latin typeface="Verdana"/>
+              </a:rPr>
+              <a:t> toilettes · </a:t>
+            </a:r>
+            <a:r>
+              <a:rPr sz="2000" b="1" i="0">
+                <a:solidFill>
+                  <a:srgbClr val="4B4F52"/>
+                </a:solidFill>
+                <a:latin typeface="Verdana"/>
+              </a:rPr>
+              <a:t>l'</a:t>
+            </a:r>
+            <a:r>
+              <a:rPr sz="2000" b="0" i="0">
+                <a:solidFill>
+                  <a:srgbClr val="4B4F52"/>
+                </a:solidFill>
+                <a:latin typeface="Verdana"/>
+              </a:rPr>
+              <a:t>accueil. Il ne se devine pas. « Cafétéria » tout seul ne s'apprend pas ; « la cafétéria », oui.</a:t>
             </a:r>
           </a:p>
         </p:txBody>
@@ -12252,7 +12315,61 @@
                 </a:solidFill>
                 <a:latin typeface="Verdana"/>
               </a:rPr>
-              <a:t>On &lt;b&gt;nomme&lt;/b&gt; : « C'est la cafétéria. » On &lt;b&gt;corrige&lt;/b&gt; : « Ce n'est pas la cafétéria. » On &lt;b&gt;demande&lt;/b&gt; : « C'est ici ? » — les mêmes mots, la voix qui monte à la fin.</a:t>
+              <a:t>On </a:t>
+            </a:r>
+            <a:r>
+              <a:rPr sz="2000" b="1" i="0">
+                <a:solidFill>
+                  <a:srgbClr val="4B4F52"/>
+                </a:solidFill>
+                <a:latin typeface="Verdana"/>
+              </a:rPr>
+              <a:t>nomme</a:t>
+            </a:r>
+            <a:r>
+              <a:rPr sz="2000" b="0" i="0">
+                <a:solidFill>
+                  <a:srgbClr val="4B4F52"/>
+                </a:solidFill>
+                <a:latin typeface="Verdana"/>
+              </a:rPr>
+              <a:t> : « C'est la cafétéria. » On </a:t>
+            </a:r>
+            <a:r>
+              <a:rPr sz="2000" b="1" i="0">
+                <a:solidFill>
+                  <a:srgbClr val="4B4F52"/>
+                </a:solidFill>
+                <a:latin typeface="Verdana"/>
+              </a:rPr>
+              <a:t>corrige</a:t>
+            </a:r>
+            <a:r>
+              <a:rPr sz="2000" b="0" i="0">
+                <a:solidFill>
+                  <a:srgbClr val="4B4F52"/>
+                </a:solidFill>
+                <a:latin typeface="Verdana"/>
+              </a:rPr>
+              <a:t> : « Ce n'est pas la cafétéria. » On </a:t>
+            </a:r>
+            <a:r>
+              <a:rPr sz="2000" b="1" i="0">
+                <a:solidFill>
+                  <a:srgbClr val="4B4F52"/>
+                </a:solidFill>
+                <a:latin typeface="Verdana"/>
+              </a:rPr>
+              <a:t>demande</a:t>
+            </a:r>
+            <a:r>
+              <a:rPr sz="2000" b="0" i="0">
+                <a:solidFill>
+                  <a:srgbClr val="4B4F52"/>
+                </a:solidFill>
+                <a:latin typeface="Verdana"/>
+              </a:rPr>
+              <a:t> : « C'est ici ? » — les mêmes mots, la voix qui monte à la fin.</a:t>
             </a:r>
           </a:p>
         </p:txBody>
